--- a/UART.pptx
+++ b/UART.pptx
@@ -146,7 +146,7 @@
   <pc:docChgLst>
     <pc:chgData name="sravanthi vennapusa" userId="302e7c8c7e7567a6" providerId="LiveId" clId="{9B2BFCF3-BB9D-4917-9B53-4ED52D43BFF8}"/>
     <pc:docChg chg="undo custSel addSld delSld modSld sldOrd">
-      <pc:chgData name="sravanthi vennapusa" userId="302e7c8c7e7567a6" providerId="LiveId" clId="{9B2BFCF3-BB9D-4917-9B53-4ED52D43BFF8}" dt="2026-02-18T04:58:16.435" v="121"/>
+      <pc:chgData name="sravanthi vennapusa" userId="302e7c8c7e7567a6" providerId="LiveId" clId="{9B2BFCF3-BB9D-4917-9B53-4ED52D43BFF8}" dt="2026-02-18T05:45:01.328" v="122" actId="113"/>
       <pc:docMkLst>
         <pc:docMk/>
       </pc:docMkLst>
@@ -174,13 +174,13 @@
         </pc:spChg>
       </pc:sldChg>
       <pc:sldChg chg="modSp mod">
-        <pc:chgData name="sravanthi vennapusa" userId="302e7c8c7e7567a6" providerId="LiveId" clId="{9B2BFCF3-BB9D-4917-9B53-4ED52D43BFF8}" dt="2026-02-13T05:06:34.499" v="88"/>
+        <pc:chgData name="sravanthi vennapusa" userId="302e7c8c7e7567a6" providerId="LiveId" clId="{9B2BFCF3-BB9D-4917-9B53-4ED52D43BFF8}" dt="2026-02-18T05:45:01.328" v="122" actId="113"/>
         <pc:sldMkLst>
           <pc:docMk/>
           <pc:sldMk cId="55235005" sldId="257"/>
         </pc:sldMkLst>
         <pc:spChg chg="mod">
-          <ac:chgData name="sravanthi vennapusa" userId="302e7c8c7e7567a6" providerId="LiveId" clId="{9B2BFCF3-BB9D-4917-9B53-4ED52D43BFF8}" dt="2026-02-13T05:06:34.499" v="88"/>
+          <ac:chgData name="sravanthi vennapusa" userId="302e7c8c7e7567a6" providerId="LiveId" clId="{9B2BFCF3-BB9D-4917-9B53-4ED52D43BFF8}" dt="2026-02-18T05:45:01.328" v="122" actId="113"/>
           <ac:spMkLst>
             <pc:docMk/>
             <pc:sldMk cId="55235005" sldId="257"/>
@@ -24186,14 +24186,9 @@
           </a:p>
           <a:p>
             <a:r>
-              <a:rPr lang="en-US" dirty="0"/>
-              <a:t>Timing is agreed using </a:t>
+              <a:rPr lang="en-US" b="1" dirty="0"/>
+              <a:t>Timing is agreed using baud rate</a:t>
             </a:r>
-            <a:r>
-              <a:rPr lang="en-US" b="1" dirty="0"/>
-              <a:t>baud rate</a:t>
-            </a:r>
-            <a:endParaRPr lang="en-US" dirty="0"/>
           </a:p>
           <a:p>
             <a:r>
